--- a/slides/07-network-analysis.pptx
+++ b/slides/07-network-analysis.pptx
@@ -228,7 +228,7 @@
           <a:p>
             <a:fld id="{2CD22518-F7FE-2E40-9C60-793856882CE6}" type="datetimeFigureOut">
               <a:rPr lang="en-US" smtClean="0"/>
-              <a:t>1/15/26</a:t>
+              <a:t>2/19/26</a:t>
             </a:fld>
             <a:endParaRPr lang="en-US"/>
           </a:p>
@@ -748,7 +748,7 @@
             <a:fld id="{B61BEF0D-F0BB-DE4B-95CE-6DB70DBA9567}" type="datetimeFigureOut">
               <a:rPr lang="en-US" smtClean="0"/>
               <a:pPr/>
-              <a:t>1/15/26</a:t>
+              <a:t>2/19/26</a:t>
             </a:fld>
             <a:endParaRPr lang="en-US" dirty="0"/>
           </a:p>
@@ -1012,7 +1012,7 @@
             <a:fld id="{B61BEF0D-F0BB-DE4B-95CE-6DB70DBA9567}" type="datetimeFigureOut">
               <a:rPr lang="en-US" smtClean="0"/>
               <a:pPr/>
-              <a:t>1/15/26</a:t>
+              <a:t>2/19/26</a:t>
             </a:fld>
             <a:endParaRPr lang="en-US" dirty="0"/>
           </a:p>
@@ -1249,7 +1249,7 @@
             <a:fld id="{B61BEF0D-F0BB-DE4B-95CE-6DB70DBA9567}" type="datetimeFigureOut">
               <a:rPr lang="en-US" smtClean="0"/>
               <a:pPr/>
-              <a:t>1/15/26</a:t>
+              <a:t>2/19/26</a:t>
             </a:fld>
             <a:endParaRPr lang="en-US" dirty="0"/>
           </a:p>
@@ -1498,7 +1498,7 @@
             <a:fld id="{B61BEF0D-F0BB-DE4B-95CE-6DB70DBA9567}" type="datetimeFigureOut">
               <a:rPr lang="en-US" smtClean="0"/>
               <a:pPr/>
-              <a:t>1/15/26</a:t>
+              <a:t>2/19/26</a:t>
             </a:fld>
             <a:endParaRPr lang="en-US" dirty="0"/>
           </a:p>
@@ -1807,7 +1807,7 @@
             <a:fld id="{B61BEF0D-F0BB-DE4B-95CE-6DB70DBA9567}" type="datetimeFigureOut">
               <a:rPr lang="en-US" smtClean="0"/>
               <a:pPr/>
-              <a:t>1/15/26</a:t>
+              <a:t>2/19/26</a:t>
             </a:fld>
             <a:endParaRPr lang="en-US" dirty="0"/>
           </a:p>
@@ -2111,7 +2111,7 @@
             <a:fld id="{B61BEF0D-F0BB-DE4B-95CE-6DB70DBA9567}" type="datetimeFigureOut">
               <a:rPr lang="en-US" smtClean="0"/>
               <a:pPr/>
-              <a:t>1/15/26</a:t>
+              <a:t>2/19/26</a:t>
             </a:fld>
             <a:endParaRPr lang="en-US" dirty="0"/>
           </a:p>
@@ -2535,7 +2535,7 @@
             <a:fld id="{B61BEF0D-F0BB-DE4B-95CE-6DB70DBA9567}" type="datetimeFigureOut">
               <a:rPr lang="en-US" smtClean="0"/>
               <a:pPr/>
-              <a:t>1/15/26</a:t>
+              <a:t>2/19/26</a:t>
             </a:fld>
             <a:endParaRPr lang="en-US" dirty="0"/>
           </a:p>
@@ -2632,7 +2632,7 @@
             <a:fld id="{B61BEF0D-F0BB-DE4B-95CE-6DB70DBA9567}" type="datetimeFigureOut">
               <a:rPr lang="en-US" smtClean="0"/>
               <a:pPr/>
-              <a:t>1/15/26</a:t>
+              <a:t>2/19/26</a:t>
             </a:fld>
             <a:endParaRPr lang="en-US" dirty="0"/>
           </a:p>
@@ -2796,7 +2796,7 @@
             <a:fld id="{B61BEF0D-F0BB-DE4B-95CE-6DB70DBA9567}" type="datetimeFigureOut">
               <a:rPr lang="en-US" smtClean="0"/>
               <a:pPr/>
-              <a:t>1/15/26</a:t>
+              <a:t>2/19/26</a:t>
             </a:fld>
             <a:endParaRPr lang="en-US" dirty="0"/>
           </a:p>
@@ -3176,7 +3176,7 @@
             <a:fld id="{B61BEF0D-F0BB-DE4B-95CE-6DB70DBA9567}" type="datetimeFigureOut">
               <a:rPr lang="en-US" smtClean="0"/>
               <a:pPr/>
-              <a:t>1/15/26</a:t>
+              <a:t>2/19/26</a:t>
             </a:fld>
             <a:endParaRPr lang="en-US" dirty="0"/>
           </a:p>
@@ -3467,7 +3467,7 @@
             <a:fld id="{B61BEF0D-F0BB-DE4B-95CE-6DB70DBA9567}" type="datetimeFigureOut">
               <a:rPr lang="en-US" smtClean="0"/>
               <a:pPr/>
-              <a:t>1/15/26</a:t>
+              <a:t>2/19/26</a:t>
             </a:fld>
             <a:endParaRPr lang="en-US" dirty="0"/>
           </a:p>
@@ -3680,7 +3680,7 @@
             <a:fld id="{B61BEF0D-F0BB-DE4B-95CE-6DB70DBA9567}" type="datetimeFigureOut">
               <a:rPr lang="en-US" smtClean="0"/>
               <a:pPr/>
-              <a:t>1/15/26</a:t>
+              <a:t>2/19/26</a:t>
             </a:fld>
             <a:endParaRPr lang="en-US" dirty="0"/>
           </a:p>
@@ -4432,8 +4432,8 @@
           </a:p>
         </p:txBody>
       </p:sp>
-      <mc:AlternateContent xmlns:mc="http://schemas.openxmlformats.org/markup-compatibility/2006">
-        <mc:Choice xmlns:a14="http://schemas.microsoft.com/office/drawing/2010/main" Requires="a14">
+      <mc:AlternateContent xmlns:mc="http://schemas.openxmlformats.org/markup-compatibility/2006" xmlns:a14="http://schemas.microsoft.com/office/drawing/2010/main">
+        <mc:Choice Requires="a14">
           <p:sp>
             <p:nvSpPr>
               <p:cNvPr id="3" name="Content Placeholder 2">
@@ -4603,6 +4603,7 @@
                         <a:solidFill>
                           <a:srgbClr val="2F2B20"/>
                         </a:solidFill>
+                        <a:latin typeface="Cambria Math" panose="02040503050406030204" pitchFamily="18" charset="0"/>
                       </a:rPr>
                       <m:t>𝑣</m:t>
                     </m:r>
@@ -4658,6 +4659,7 @@
                         <a:solidFill>
                           <a:srgbClr val="2F2B20"/>
                         </a:solidFill>
+                        <a:latin typeface="Cambria Math" panose="02040503050406030204" pitchFamily="18" charset="0"/>
                       </a:rPr>
                       <m:t>𝑢</m:t>
                     </m:r>
@@ -4678,6 +4680,7 @@
                         <a:solidFill>
                           <a:srgbClr val="2F2B20"/>
                         </a:solidFill>
+                        <a:latin typeface="Cambria Math" panose="02040503050406030204" pitchFamily="18" charset="0"/>
                       </a:rPr>
                       <m:t>𝑢</m:t>
                     </m:r>
@@ -4717,6 +4720,7 @@
                         <a:solidFill>
                           <a:srgbClr val="2F2B20"/>
                         </a:solidFill>
+                        <a:latin typeface="Cambria Math" panose="02040503050406030204" pitchFamily="18" charset="0"/>
                       </a:rPr>
                       <m:t>𝑣</m:t>
                     </m:r>
@@ -4748,6 +4752,7 @@
                         <a:solidFill>
                           <a:srgbClr val="2F2B20"/>
                         </a:solidFill>
+                        <a:latin typeface="Cambria Math" panose="02040503050406030204" pitchFamily="18" charset="0"/>
                       </a:rPr>
                       <m:t>𝑢</m:t>
                     </m:r>
@@ -4784,6 +4789,7 @@
                         <a:solidFill>
                           <a:srgbClr val="2F2B20"/>
                         </a:solidFill>
+                        <a:latin typeface="Cambria Math" panose="02040503050406030204" pitchFamily="18" charset="0"/>
                       </a:rPr>
                       <m:t>𝑣</m:t>
                     </m:r>
@@ -4831,7 +4837,7 @@
             </p:txBody>
           </p:sp>
         </mc:Choice>
-        <mc:Fallback>
+        <mc:Fallback xmlns="">
           <p:sp>
             <p:nvSpPr>
               <p:cNvPr id="3" name="Content Placeholder 2">
@@ -30062,7 +30068,7 @@
         </p:blipFill>
         <p:spPr>
           <a:xfrm>
-            <a:off x="3796145" y="3840476"/>
+            <a:off x="3796145" y="3701579"/>
             <a:ext cx="7814663" cy="1480214"/>
           </a:xfrm>
           <a:prstGeom prst="rect">
@@ -30092,7 +30098,7 @@
         </p:blipFill>
         <p:spPr>
           <a:xfrm>
-            <a:off x="581192" y="2617693"/>
+            <a:off x="581192" y="2478796"/>
             <a:ext cx="6556846" cy="1525693"/>
           </a:xfrm>
           <a:prstGeom prst="rect">

--- a/slides/07-network-analysis.pptx
+++ b/slides/07-network-analysis.pptx
@@ -30068,7 +30068,7 @@
         </p:blipFill>
         <p:spPr>
           <a:xfrm>
-            <a:off x="3796145" y="3701579"/>
+            <a:off x="3796145" y="3743491"/>
             <a:ext cx="7814663" cy="1480214"/>
           </a:xfrm>
           <a:prstGeom prst="rect">
@@ -30098,7 +30098,7 @@
         </p:blipFill>
         <p:spPr>
           <a:xfrm>
-            <a:off x="581192" y="2478796"/>
+            <a:off x="581192" y="2506853"/>
             <a:ext cx="6556846" cy="1525693"/>
           </a:xfrm>
           <a:prstGeom prst="rect">
